--- a/presentations/technical_capstone.pptx
+++ b/presentations/technical_capstone.pptx
@@ -4515,7 +4515,7 @@
               </a:defRPr>
             </a:pPr>
             <a:r>
-              <a:t>•  No live alert is defined. SLA references are inherited project assumptions, not verified policy.</a:t>
+              <a:t>•  No live alert is defined. SLA references are project-configured assumptions, not verified policy.</a:t>
             </a:r>
           </a:p>
         </p:txBody>

--- a/presentations/technical_capstone.pptx
+++ b/presentations/technical_capstone.pptx
@@ -3095,7 +3095,7 @@
     <p:bg>
       <p:bgPr>
         <a:solidFill>
-          <a:srgbClr val="1F3752"/>
+          <a:srgbClr val="5B1220"/>
         </a:solidFill>
         <a:effectLst/>
       </p:bgPr>
@@ -3161,7 +3161,7 @@
             <a:avLst/>
           </a:prstGeom>
           <a:solidFill>
-            <a:srgbClr val="3470A8"/>
+            <a:srgbClr val="C8102E"/>
           </a:solidFill>
           <a:ln>
             <a:noFill/>
@@ -3220,7 +3220,7 @@
               </a:spcAft>
               <a:defRPr sz="2000">
                 <a:solidFill>
-                  <a:srgbClr val="D6E2ED"/>
+                  <a:srgbClr val="F2D7DA"/>
                 </a:solidFill>
                 <a:latin typeface="DejaVu Sans"/>
               </a:defRPr>
@@ -3239,7 +3239,7 @@
               </a:spcAft>
               <a:defRPr sz="2000">
                 <a:solidFill>
-                  <a:srgbClr val="D6E2ED"/>
+                  <a:srgbClr val="F2D7DA"/>
                 </a:solidFill>
                 <a:latin typeface="DejaVu Sans"/>
               </a:defRPr>
@@ -3258,13 +3258,85 @@
               </a:spcAft>
               <a:defRPr sz="2000">
                 <a:solidFill>
-                  <a:srgbClr val="D6E2ED"/>
+                  <a:srgbClr val="F2D7DA"/>
                 </a:solidFill>
                 <a:latin typeface="DejaVu Sans"/>
               </a:defRPr>
             </a:pPr>
             <a:r>
               <a:t>Historical experiment, not operational approval or current performance evidence</a:t>
+            </a:r>
+          </a:p>
+        </p:txBody>
+      </p:sp>
+      <p:sp>
+        <p:nvSpPr>
+          <p:cNvPr id="5" name="TextBox 4"/>
+          <p:cNvSpPr txBox="1"/>
+          <p:nvPr/>
+        </p:nvSpPr>
+        <p:spPr>
+          <a:xfrm>
+            <a:off x="868680" y="1600200"/>
+            <a:ext cx="10515600" cy="365760"/>
+          </a:xfrm>
+          <a:prstGeom prst="rect">
+            <a:avLst/>
+          </a:prstGeom>
+          <a:noFill/>
+        </p:spPr>
+        <p:txBody>
+          <a:bodyPr wrap="square">
+            <a:spAutoFit/>
+          </a:bodyPr>
+          <a:lstStyle/>
+          <a:p>
+            <a:pPr>
+              <a:defRPr sz="1400" b="1">
+                <a:solidFill>
+                  <a:srgbClr val="F2A7AE"/>
+                </a:solidFill>
+                <a:latin typeface="DejaVu Sans"/>
+              </a:defRPr>
+            </a:pPr>
+            <a:r>
+              <a:t>TECHNICAL CAPSTONE  |  SERVICE ANALYTICS</a:t>
+            </a:r>
+          </a:p>
+        </p:txBody>
+      </p:sp>
+      <p:sp>
+        <p:nvSpPr>
+          <p:cNvPr id="6" name="TextBox 5"/>
+          <p:cNvSpPr txBox="1"/>
+          <p:nvPr/>
+        </p:nvSpPr>
+        <p:spPr>
+          <a:xfrm>
+            <a:off x="868680" y="6263640"/>
+            <a:ext cx="10515600" cy="320040"/>
+          </a:xfrm>
+          <a:prstGeom prst="rect">
+            <a:avLst/>
+          </a:prstGeom>
+          <a:noFill/>
+        </p:spPr>
+        <p:txBody>
+          <a:bodyPr wrap="square">
+            <a:spAutoFit/>
+          </a:bodyPr>
+          <a:lstStyle/>
+          <a:p>
+            <a:pPr>
+              <a:defRPr sz="1200">
+                <a:solidFill>
+                  <a:srgbClr val="D79AA2"/>
+                </a:solidFill>
+                <a:latin typeface="DejaVu Sans"/>
+              </a:defRPr>
+            </a:pPr>
+            <a:r>
+              <a:t>Historical analysis of 27,348 scoped tickets  |  2016-2023  |  12 slides</a:t>
             </a:r>
           </a:p>
         </p:txBody>
@@ -3283,7 +3355,7 @@
     <p:bg>
       <p:bgPr>
         <a:solidFill>
-          <a:srgbClr val="F8FAFC"/>
+          <a:srgbClr val="FDF9F9"/>
         </a:solidFill>
         <a:effectLst/>
       </p:bgPr>
@@ -3310,7 +3382,7 @@
             <a:avLst/>
           </a:prstGeom>
           <a:solidFill>
-            <a:srgbClr val="3470A8"/>
+            <a:srgbClr val="C8102E"/>
           </a:solidFill>
           <a:ln>
             <a:noFill/>
@@ -3366,7 +3438,7 @@
               </a:lnSpc>
               <a:defRPr sz="2800" b="1">
                 <a:solidFill>
-                  <a:srgbClr val="1F3752"/>
+                  <a:srgbClr val="5B1220"/>
                 </a:solidFill>
                 <a:latin typeface="DejaVu Sans"/>
               </a:defRPr>
@@ -3392,7 +3464,7 @@
             <a:avLst/>
           </a:prstGeom>
           <a:solidFill>
-            <a:srgbClr val="3470A8"/>
+            <a:srgbClr val="C8102E"/>
           </a:solidFill>
           <a:ln>
             <a:noFill/>
@@ -3429,7 +3501,7 @@
         <p:spPr>
           <a:xfrm>
             <a:off x="822960" y="1536192"/>
-            <a:ext cx="10515600" cy="3615690"/>
+            <a:ext cx="10515600" cy="4183380"/>
           </a:xfrm>
           <a:prstGeom prst="rect">
             <a:avLst/>
@@ -3451,7 +3523,7 @@
               </a:spcAft>
               <a:defRPr sz="1800">
                 <a:solidFill>
-                  <a:srgbClr val="4B545D"/>
+                  <a:srgbClr val="4A4448"/>
                 </a:solidFill>
                 <a:latin typeface="DejaVu Sans"/>
               </a:defRPr>
@@ -3470,7 +3542,7 @@
               </a:spcAft>
               <a:defRPr sz="1800">
                 <a:solidFill>
-                  <a:srgbClr val="4B545D"/>
+                  <a:srgbClr val="4A4448"/>
                 </a:solidFill>
                 <a:latin typeface="DejaVu Sans"/>
               </a:defRPr>
@@ -3489,7 +3561,7 @@
               </a:spcAft>
               <a:defRPr sz="1800">
                 <a:solidFill>
-                  <a:srgbClr val="4B545D"/>
+                  <a:srgbClr val="4A4448"/>
                 </a:solidFill>
                 <a:latin typeface="DejaVu Sans"/>
               </a:defRPr>
@@ -3508,7 +3580,7 @@
               </a:spcAft>
               <a:defRPr sz="1800">
                 <a:solidFill>
-                  <a:srgbClr val="4B545D"/>
+                  <a:srgbClr val="4A4448"/>
                 </a:solidFill>
                 <a:latin typeface="DejaVu Sans"/>
               </a:defRPr>
@@ -3527,13 +3599,32 @@
               </a:spcAft>
               <a:defRPr sz="1500">
                 <a:solidFill>
-                  <a:srgbClr val="4B545D"/>
+                  <a:srgbClr val="4A4448"/>
                 </a:solidFill>
                 <a:latin typeface="DejaVu Sans"/>
               </a:defRPr>
             </a:pPr>
             <a:r>
               <a:t>•  Missing demographics, measured ROI or production are not automatic academic failures; explicit rubric requirements still apply.</a:t>
+            </a:r>
+          </a:p>
+          <a:p>
+            <a:pPr>
+              <a:lnSpc>
+                <a:spcPct val="125000"/>
+              </a:lnSpc>
+              <a:spcAft>
+                <a:spcPts val="0"/>
+              </a:spcAft>
+              <a:defRPr sz="1500" b="1">
+                <a:solidFill>
+                  <a:srgbClr val="C8102E"/>
+                </a:solidFill>
+                <a:latin typeface="DejaVu Sans"/>
+              </a:defRPr>
+            </a:pPr>
+            <a:r>
+              <a:t>Bottom line: fairness cannot be verified without protected attributes, so human review stays in the loop.</a:t>
             </a:r>
           </a:p>
         </p:txBody>
@@ -3563,7 +3654,7 @@
             <a:pPr>
               <a:defRPr sz="1000">
                 <a:solidFill>
-                  <a:srgbClr val="4B545D"/>
+                  <a:srgbClr val="4A4448"/>
                 </a:solidFill>
               </a:defRPr>
             </a:pPr>
@@ -3598,7 +3689,7 @@
             <a:pPr>
               <a:defRPr sz="1000" b="0">
                 <a:solidFill>
-                  <a:srgbClr val="4B545D"/>
+                  <a:srgbClr val="4A4448"/>
                 </a:solidFill>
                 <a:latin typeface="DejaVu Sans"/>
               </a:defRPr>
@@ -3623,7 +3714,7 @@
     <p:bg>
       <p:bgPr>
         <a:solidFill>
-          <a:srgbClr val="F8FAFC"/>
+          <a:srgbClr val="FDF9F9"/>
         </a:solidFill>
         <a:effectLst/>
       </p:bgPr>
@@ -3650,7 +3741,7 @@
             <a:avLst/>
           </a:prstGeom>
           <a:solidFill>
-            <a:srgbClr val="3470A8"/>
+            <a:srgbClr val="C8102E"/>
           </a:solidFill>
           <a:ln>
             <a:noFill/>
@@ -3706,7 +3797,7 @@
               </a:lnSpc>
               <a:defRPr sz="2800" b="1">
                 <a:solidFill>
-                  <a:srgbClr val="1F3752"/>
+                  <a:srgbClr val="5B1220"/>
                 </a:solidFill>
                 <a:latin typeface="DejaVu Sans"/>
               </a:defRPr>
@@ -3732,7 +3823,7 @@
             <a:avLst/>
           </a:prstGeom>
           <a:solidFill>
-            <a:srgbClr val="3470A8"/>
+            <a:srgbClr val="C8102E"/>
           </a:solidFill>
           <a:ln>
             <a:noFill/>
@@ -3769,7 +3860,7 @@
         <p:spPr>
           <a:xfrm>
             <a:off x="822960" y="1536192"/>
-            <a:ext cx="10515600" cy="3568065"/>
+            <a:ext cx="10515600" cy="4135755"/>
           </a:xfrm>
           <a:prstGeom prst="rect">
             <a:avLst/>
@@ -3791,7 +3882,7 @@
               </a:spcAft>
               <a:defRPr sz="1500">
                 <a:solidFill>
-                  <a:srgbClr val="4B545D"/>
+                  <a:srgbClr val="4A4448"/>
                 </a:solidFill>
                 <a:latin typeface="DejaVu Sans"/>
               </a:defRPr>
@@ -3810,7 +3901,7 @@
               </a:spcAft>
               <a:defRPr sz="1800">
                 <a:solidFill>
-                  <a:srgbClr val="4B545D"/>
+                  <a:srgbClr val="4A4448"/>
                 </a:solidFill>
                 <a:latin typeface="DejaVu Sans"/>
               </a:defRPr>
@@ -3829,7 +3920,7 @@
               </a:spcAft>
               <a:defRPr sz="1500">
                 <a:solidFill>
-                  <a:srgbClr val="4B545D"/>
+                  <a:srgbClr val="4A4448"/>
                 </a:solidFill>
                 <a:latin typeface="DejaVu Sans"/>
               </a:defRPr>
@@ -3848,7 +3939,7 @@
               </a:spcAft>
               <a:defRPr sz="1500">
                 <a:solidFill>
-                  <a:srgbClr val="4B545D"/>
+                  <a:srgbClr val="4A4448"/>
                 </a:solidFill>
                 <a:latin typeface="DejaVu Sans"/>
               </a:defRPr>
@@ -3867,13 +3958,32 @@
               </a:spcAft>
               <a:defRPr sz="1500">
                 <a:solidFill>
-                  <a:srgbClr val="4B545D"/>
+                  <a:srgbClr val="4A4448"/>
                 </a:solidFill>
                 <a:latin typeface="DejaVu Sans"/>
               </a:defRPr>
             </a:pPr>
             <a:r>
               <a:t>•  Monitoring plan defines retrain triggers (schedule, drift, new source coverage) before any of this becomes an operational service.</a:t>
+            </a:r>
+          </a:p>
+          <a:p>
+            <a:pPr>
+              <a:lnSpc>
+                <a:spcPct val="125000"/>
+              </a:lnSpc>
+              <a:spcAft>
+                <a:spcPts val="0"/>
+              </a:spcAft>
+              <a:defRPr sz="1500" b="1">
+                <a:solidFill>
+                  <a:srgbClr val="C8102E"/>
+                </a:solidFill>
+                <a:latin typeface="DejaVu Sans"/>
+              </a:defRPr>
+            </a:pPr>
+            <a:r>
+              <a:t>Bottom line: the model is reproducible and demo-ready, while the Power BI evidence and monitoring remain proof-of-concept.</a:t>
             </a:r>
           </a:p>
         </p:txBody>
@@ -3903,7 +4013,7 @@
             <a:pPr>
               <a:defRPr sz="1000">
                 <a:solidFill>
-                  <a:srgbClr val="4B545D"/>
+                  <a:srgbClr val="4A4448"/>
                 </a:solidFill>
               </a:defRPr>
             </a:pPr>
@@ -3938,7 +4048,7 @@
             <a:pPr>
               <a:defRPr sz="1000" b="0">
                 <a:solidFill>
-                  <a:srgbClr val="4B545D"/>
+                  <a:srgbClr val="4A4448"/>
                 </a:solidFill>
                 <a:latin typeface="DejaVu Sans"/>
               </a:defRPr>
@@ -3963,7 +4073,7 @@
     <p:bg>
       <p:bgPr>
         <a:solidFill>
-          <a:srgbClr val="F8FAFC"/>
+          <a:srgbClr val="FDF9F9"/>
         </a:solidFill>
         <a:effectLst/>
       </p:bgPr>
@@ -3990,7 +4100,7 @@
             <a:avLst/>
           </a:prstGeom>
           <a:solidFill>
-            <a:srgbClr val="3470A8"/>
+            <a:srgbClr val="C8102E"/>
           </a:solidFill>
           <a:ln>
             <a:noFill/>
@@ -4046,7 +4156,7 @@
               </a:lnSpc>
               <a:defRPr sz="2800" b="1">
                 <a:solidFill>
-                  <a:srgbClr val="1F3752"/>
+                  <a:srgbClr val="5B1220"/>
                 </a:solidFill>
                 <a:latin typeface="DejaVu Sans"/>
               </a:defRPr>
@@ -4072,7 +4182,7 @@
             <a:avLst/>
           </a:prstGeom>
           <a:solidFill>
-            <a:srgbClr val="3470A8"/>
+            <a:srgbClr val="C8102E"/>
           </a:solidFill>
           <a:ln>
             <a:noFill/>
@@ -4109,7 +4219,7 @@
         <p:spPr>
           <a:xfrm>
             <a:off x="822960" y="1536192"/>
-            <a:ext cx="10515600" cy="2891790"/>
+            <a:ext cx="10515600" cy="3459480"/>
           </a:xfrm>
           <a:prstGeom prst="rect">
             <a:avLst/>
@@ -4131,7 +4241,7 @@
               </a:spcAft>
               <a:defRPr sz="1500">
                 <a:solidFill>
-                  <a:srgbClr val="4B545D"/>
+                  <a:srgbClr val="4A4448"/>
                 </a:solidFill>
                 <a:latin typeface="DejaVu Sans"/>
               </a:defRPr>
@@ -4150,7 +4260,7 @@
               </a:spcAft>
               <a:defRPr sz="1800">
                 <a:solidFill>
-                  <a:srgbClr val="4B545D"/>
+                  <a:srgbClr val="4A4448"/>
                 </a:solidFill>
                 <a:latin typeface="DejaVu Sans"/>
               </a:defRPr>
@@ -4169,7 +4279,7 @@
               </a:spcAft>
               <a:defRPr sz="1800">
                 <a:solidFill>
-                  <a:srgbClr val="4B545D"/>
+                  <a:srgbClr val="4A4448"/>
                 </a:solidFill>
                 <a:latin typeface="DejaVu Sans"/>
               </a:defRPr>
@@ -4188,13 +4298,32 @@
               </a:spcAft>
               <a:defRPr sz="1800">
                 <a:solidFill>
-                  <a:srgbClr val="4B545D"/>
+                  <a:srgbClr val="4A4448"/>
                 </a:solidFill>
                 <a:latin typeface="DejaVu Sans"/>
               </a:defRPr>
             </a:pPr>
             <a:r>
               <a:t>•  Conclusion: stronger historical prototype, not an operationally validated staffing or compliance system.</a:t>
+            </a:r>
+          </a:p>
+          <a:p>
+            <a:pPr>
+              <a:lnSpc>
+                <a:spcPct val="125000"/>
+              </a:lnSpc>
+              <a:spcAft>
+                <a:spcPts val="0"/>
+              </a:spcAft>
+              <a:defRPr sz="1500" b="1">
+                <a:solidFill>
+                  <a:srgbClr val="C8102E"/>
+                </a:solidFill>
+                <a:latin typeface="DejaVu Sans"/>
+              </a:defRPr>
+            </a:pPr>
+            <a:r>
+              <a:t>Bottom line: a credible historical prototype — operational validation is the next step, not a claim made today.</a:t>
             </a:r>
           </a:p>
         </p:txBody>
@@ -4224,7 +4353,7 @@
             <a:pPr>
               <a:defRPr sz="1000">
                 <a:solidFill>
-                  <a:srgbClr val="4B545D"/>
+                  <a:srgbClr val="4A4448"/>
                 </a:solidFill>
               </a:defRPr>
             </a:pPr>
@@ -4259,7 +4388,7 @@
             <a:pPr>
               <a:defRPr sz="1000" b="0">
                 <a:solidFill>
-                  <a:srgbClr val="4B545D"/>
+                  <a:srgbClr val="4A4448"/>
                 </a:solidFill>
                 <a:latin typeface="DejaVu Sans"/>
               </a:defRPr>
@@ -4284,7 +4413,7 @@
     <p:bg>
       <p:bgPr>
         <a:solidFill>
-          <a:srgbClr val="F8FAFC"/>
+          <a:srgbClr val="FDF9F9"/>
         </a:solidFill>
         <a:effectLst/>
       </p:bgPr>
@@ -4311,7 +4440,7 @@
             <a:avLst/>
           </a:prstGeom>
           <a:solidFill>
-            <a:srgbClr val="3470A8"/>
+            <a:srgbClr val="C8102E"/>
           </a:solidFill>
           <a:ln>
             <a:noFill/>
@@ -4367,7 +4496,7 @@
               </a:lnSpc>
               <a:defRPr sz="2800" b="1">
                 <a:solidFill>
-                  <a:srgbClr val="1F3752"/>
+                  <a:srgbClr val="5B1220"/>
                 </a:solidFill>
                 <a:latin typeface="DejaVu Sans"/>
               </a:defRPr>
@@ -4393,7 +4522,7 @@
             <a:avLst/>
           </a:prstGeom>
           <a:solidFill>
-            <a:srgbClr val="3470A8"/>
+            <a:srgbClr val="C8102E"/>
           </a:solidFill>
           <a:ln>
             <a:noFill/>
@@ -4430,7 +4559,7 @@
         <p:spPr>
           <a:xfrm>
             <a:off x="822960" y="1536192"/>
-            <a:ext cx="10515600" cy="2987040"/>
+            <a:ext cx="10515600" cy="3554730"/>
           </a:xfrm>
           <a:prstGeom prst="rect">
             <a:avLst/>
@@ -4452,7 +4581,7 @@
               </a:spcAft>
               <a:defRPr sz="1800">
                 <a:solidFill>
-                  <a:srgbClr val="4B545D"/>
+                  <a:srgbClr val="4A4448"/>
                 </a:solidFill>
                 <a:latin typeface="DejaVu Sans"/>
               </a:defRPr>
@@ -4471,7 +4600,7 @@
               </a:spcAft>
               <a:defRPr sz="1800">
                 <a:solidFill>
-                  <a:srgbClr val="4B545D"/>
+                  <a:srgbClr val="4A4448"/>
                 </a:solidFill>
                 <a:latin typeface="DejaVu Sans"/>
               </a:defRPr>
@@ -4490,7 +4619,7 @@
               </a:spcAft>
               <a:defRPr sz="1800">
                 <a:solidFill>
-                  <a:srgbClr val="4B545D"/>
+                  <a:srgbClr val="4A4448"/>
                 </a:solidFill>
                 <a:latin typeface="DejaVu Sans"/>
               </a:defRPr>
@@ -4509,13 +4638,32 @@
               </a:spcAft>
               <a:defRPr sz="1800">
                 <a:solidFill>
-                  <a:srgbClr val="4B545D"/>
+                  <a:srgbClr val="4A4448"/>
                 </a:solidFill>
                 <a:latin typeface="DejaVu Sans"/>
               </a:defRPr>
             </a:pPr>
             <a:r>
               <a:t>•  No live alert is defined. SLA references are project-configured assumptions, not verified policy.</a:t>
+            </a:r>
+          </a:p>
+          <a:p>
+            <a:pPr>
+              <a:lnSpc>
+                <a:spcPct val="125000"/>
+              </a:lnSpc>
+              <a:spcAft>
+                <a:spcPts val="0"/>
+              </a:spcAft>
+              <a:defRPr sz="1500" b="1">
+                <a:solidFill>
+                  <a:srgbClr val="C8102E"/>
+                </a:solidFill>
+                <a:latin typeface="DejaVu Sans"/>
+              </a:defRPr>
+            </a:pPr>
+            <a:r>
+              <a:t>Bottom line: this work measures historical SLA-reference attainment and daily ticket arrivals — no live alerting is in scope.</a:t>
             </a:r>
           </a:p>
         </p:txBody>
@@ -4545,7 +4693,7 @@
             <a:pPr>
               <a:defRPr sz="1000">
                 <a:solidFill>
-                  <a:srgbClr val="4B545D"/>
+                  <a:srgbClr val="4A4448"/>
                 </a:solidFill>
               </a:defRPr>
             </a:pPr>
@@ -4580,7 +4728,7 @@
             <a:pPr>
               <a:defRPr sz="1000" b="0">
                 <a:solidFill>
-                  <a:srgbClr val="4B545D"/>
+                  <a:srgbClr val="4A4448"/>
                 </a:solidFill>
                 <a:latin typeface="DejaVu Sans"/>
               </a:defRPr>
@@ -4605,7 +4753,7 @@
     <p:bg>
       <p:bgPr>
         <a:solidFill>
-          <a:srgbClr val="F8FAFC"/>
+          <a:srgbClr val="FDF9F9"/>
         </a:solidFill>
         <a:effectLst/>
       </p:bgPr>
@@ -4632,7 +4780,7 @@
             <a:avLst/>
           </a:prstGeom>
           <a:solidFill>
-            <a:srgbClr val="3470A8"/>
+            <a:srgbClr val="C8102E"/>
           </a:solidFill>
           <a:ln>
             <a:noFill/>
@@ -4688,7 +4836,7 @@
               </a:lnSpc>
               <a:defRPr sz="2800" b="1">
                 <a:solidFill>
-                  <a:srgbClr val="1F3752"/>
+                  <a:srgbClr val="5B1220"/>
                 </a:solidFill>
                 <a:latin typeface="DejaVu Sans"/>
               </a:defRPr>
@@ -4714,7 +4862,7 @@
             <a:avLst/>
           </a:prstGeom>
           <a:solidFill>
-            <a:srgbClr val="3470A8"/>
+            <a:srgbClr val="C8102E"/>
           </a:solidFill>
           <a:ln>
             <a:noFill/>
@@ -4773,7 +4921,7 @@
               </a:spcAft>
               <a:defRPr sz="1300">
                 <a:solidFill>
-                  <a:srgbClr val="4B545D"/>
+                  <a:srgbClr val="4A4448"/>
                 </a:solidFill>
                 <a:latin typeface="DejaVu Sans"/>
               </a:defRPr>
@@ -4792,7 +4940,7 @@
               </a:spcAft>
               <a:defRPr sz="1300">
                 <a:solidFill>
-                  <a:srgbClr val="4B545D"/>
+                  <a:srgbClr val="4A4448"/>
                 </a:solidFill>
                 <a:latin typeface="DejaVu Sans"/>
               </a:defRPr>
@@ -4811,7 +4959,7 @@
               </a:spcAft>
               <a:defRPr sz="1300">
                 <a:solidFill>
-                  <a:srgbClr val="4B545D"/>
+                  <a:srgbClr val="4A4448"/>
                 </a:solidFill>
                 <a:latin typeface="DejaVu Sans"/>
               </a:defRPr>
@@ -4830,7 +4978,7 @@
               </a:spcAft>
               <a:defRPr sz="1100">
                 <a:solidFill>
-                  <a:srgbClr val="4B545D"/>
+                  <a:srgbClr val="4A4448"/>
                 </a:solidFill>
                 <a:latin typeface="DejaVu Sans"/>
               </a:defRPr>
@@ -4849,7 +4997,7 @@
               </a:spcAft>
               <a:defRPr sz="1300">
                 <a:solidFill>
-                  <a:srgbClr val="4B545D"/>
+                  <a:srgbClr val="4A4448"/>
                 </a:solidFill>
                 <a:latin typeface="DejaVu Sans"/>
               </a:defRPr>
@@ -4893,7 +5041,7 @@
         <p:spPr>
           <a:xfrm>
             <a:off x="822960" y="5364861"/>
-            <a:ext cx="10515600" cy="399415"/>
+            <a:ext cx="10515600" cy="967105"/>
           </a:xfrm>
           <a:prstGeom prst="rect">
             <a:avLst/>
@@ -4915,13 +5063,32 @@
               </a:spcAft>
               <a:defRPr sz="1300">
                 <a:solidFill>
-                  <a:srgbClr val="4B545D"/>
+                  <a:srgbClr val="4A4448"/>
                 </a:solidFill>
                 <a:latin typeface="DejaVu Sans"/>
               </a:defRPr>
             </a:pPr>
             <a:r>
               <a:t>•  Monthly created-Ticket counts (notebook 02, EDA): volume varies across months and thins out in later years.</a:t>
+            </a:r>
+          </a:p>
+          <a:p>
+            <a:pPr>
+              <a:lnSpc>
+                <a:spcPct val="125000"/>
+              </a:lnSpc>
+              <a:spcAft>
+                <a:spcPts val="0"/>
+              </a:spcAft>
+              <a:defRPr sz="1500" b="1">
+                <a:solidFill>
+                  <a:srgbClr val="C8102E"/>
+                </a:solidFill>
+                <a:latin typeface="DejaVu Sans"/>
+              </a:defRPr>
+            </a:pPr>
+            <a:r>
+              <a:t>Bottom line: one well-documented cohort of 27,348 tickets underpins every result, with licensing and coverage caveats stated up front.</a:t>
             </a:r>
           </a:p>
         </p:txBody>
@@ -4951,7 +5118,7 @@
             <a:pPr>
               <a:defRPr sz="1000">
                 <a:solidFill>
-                  <a:srgbClr val="4B545D"/>
+                  <a:srgbClr val="4A4448"/>
                 </a:solidFill>
               </a:defRPr>
             </a:pPr>
@@ -4986,7 +5153,7 @@
             <a:pPr>
               <a:defRPr sz="1000" b="0">
                 <a:solidFill>
-                  <a:srgbClr val="4B545D"/>
+                  <a:srgbClr val="4A4448"/>
                 </a:solidFill>
                 <a:latin typeface="DejaVu Sans"/>
               </a:defRPr>
@@ -5011,7 +5178,7 @@
     <p:bg>
       <p:bgPr>
         <a:solidFill>
-          <a:srgbClr val="F8FAFC"/>
+          <a:srgbClr val="FDF9F9"/>
         </a:solidFill>
         <a:effectLst/>
       </p:bgPr>
@@ -5038,7 +5205,7 @@
             <a:avLst/>
           </a:prstGeom>
           <a:solidFill>
-            <a:srgbClr val="3470A8"/>
+            <a:srgbClr val="C8102E"/>
           </a:solidFill>
           <a:ln>
             <a:noFill/>
@@ -5094,7 +5261,7 @@
               </a:lnSpc>
               <a:defRPr sz="2800" b="1">
                 <a:solidFill>
-                  <a:srgbClr val="1F3752"/>
+                  <a:srgbClr val="5B1220"/>
                 </a:solidFill>
                 <a:latin typeface="DejaVu Sans"/>
               </a:defRPr>
@@ -5120,7 +5287,7 @@
             <a:avLst/>
           </a:prstGeom>
           <a:solidFill>
-            <a:srgbClr val="3470A8"/>
+            <a:srgbClr val="C8102E"/>
           </a:solidFill>
           <a:ln>
             <a:noFill/>
@@ -5179,7 +5346,7 @@
               </a:spcAft>
               <a:defRPr sz="1500">
                 <a:solidFill>
-                  <a:srgbClr val="4B545D"/>
+                  <a:srgbClr val="4A4448"/>
                 </a:solidFill>
                 <a:latin typeface="DejaVu Sans"/>
               </a:defRPr>
@@ -5200,7 +5367,7 @@
         </p:nvGraphicFramePr>
         <p:xfrm>
           <a:off x="822960" y="2393442"/>
-          <a:ext cx="10515600" cy="2761482"/>
+          <a:ext cx="10515600" cy="2231136"/>
         </p:xfrm>
         <a:graphic>
           <a:graphicData uri="http://schemas.openxmlformats.org/drawingml/2006/table">
@@ -5214,7 +5381,7 @@
                 <a:gridCol w="2628900"/>
                 <a:gridCol w="2628900"/>
               </a:tblGrid>
-              <a:tr h="460247">
+              <a:tr h="371856">
                 <a:tc>
                   <a:txBody>
                     <a:bodyPr wrap="square"/>
@@ -5238,7 +5405,7 @@
                   </a:txBody>
                   <a:tcPr>
                     <a:solidFill>
-                      <a:srgbClr val="1F3752"/>
+                      <a:srgbClr val="5B1220"/>
                     </a:solidFill>
                   </a:tcPr>
                 </a:tc>
@@ -5265,7 +5432,7 @@
                   </a:txBody>
                   <a:tcPr>
                     <a:solidFill>
-                      <a:srgbClr val="1F3752"/>
+                      <a:srgbClr val="5B1220"/>
                     </a:solidFill>
                   </a:tcPr>
                 </a:tc>
@@ -5292,7 +5459,7 @@
                   </a:txBody>
                   <a:tcPr>
                     <a:solidFill>
-                      <a:srgbClr val="1F3752"/>
+                      <a:srgbClr val="5B1220"/>
                     </a:solidFill>
                   </a:tcPr>
                 </a:tc>
@@ -5319,12 +5486,12 @@
                   </a:txBody>
                   <a:tcPr>
                     <a:solidFill>
-                      <a:srgbClr val="1F3752"/>
+                      <a:srgbClr val="5B1220"/>
                     </a:solidFill>
                   </a:tcPr>
                 </a:tc>
               </a:tr>
-              <a:tr h="460247">
+              <a:tr h="371856">
                 <a:tc>
                   <a:txBody>
                     <a:bodyPr wrap="square"/>
@@ -5338,7 +5505,7 @@
                       <a:r>
                         <a:rPr sz="1400">
                           <a:solidFill>
-                            <a:srgbClr val="1F3752"/>
+                            <a:srgbClr val="5B1220"/>
                           </a:solidFill>
                           <a:latin typeface="DejaVu Sans"/>
                         </a:rPr>
@@ -5365,7 +5532,7 @@
                       <a:r>
                         <a:rPr sz="1400">
                           <a:solidFill>
-                            <a:srgbClr val="4B545D"/>
+                            <a:srgbClr val="4A4448"/>
                           </a:solidFill>
                           <a:latin typeface="DejaVu Sans"/>
                         </a:rPr>
@@ -5392,7 +5559,7 @@
                       <a:r>
                         <a:rPr sz="1400">
                           <a:solidFill>
-                            <a:srgbClr val="4B545D"/>
+                            <a:srgbClr val="4A4448"/>
                           </a:solidFill>
                           <a:latin typeface="DejaVu Sans"/>
                         </a:rPr>
@@ -5419,7 +5586,7 @@
                       <a:r>
                         <a:rPr sz="1400">
                           <a:solidFill>
-                            <a:srgbClr val="4B545D"/>
+                            <a:srgbClr val="4A4448"/>
                           </a:solidFill>
                           <a:latin typeface="DejaVu Sans"/>
                         </a:rPr>
@@ -5434,7 +5601,7 @@
                   </a:tcPr>
                 </a:tc>
               </a:tr>
-              <a:tr h="460247">
+              <a:tr h="371856">
                 <a:tc>
                   <a:txBody>
                     <a:bodyPr wrap="square"/>
@@ -5448,7 +5615,7 @@
                       <a:r>
                         <a:rPr sz="1400">
                           <a:solidFill>
-                            <a:srgbClr val="1F3752"/>
+                            <a:srgbClr val="5B1220"/>
                           </a:solidFill>
                           <a:latin typeface="DejaVu Sans"/>
                         </a:rPr>
@@ -5475,7 +5642,7 @@
                       <a:r>
                         <a:rPr sz="1400">
                           <a:solidFill>
-                            <a:srgbClr val="4B545D"/>
+                            <a:srgbClr val="4A4448"/>
                           </a:solidFill>
                           <a:latin typeface="DejaVu Sans"/>
                         </a:rPr>
@@ -5502,7 +5669,7 @@
                       <a:r>
                         <a:rPr sz="1400">
                           <a:solidFill>
-                            <a:srgbClr val="4B545D"/>
+                            <a:srgbClr val="4A4448"/>
                           </a:solidFill>
                           <a:latin typeface="DejaVu Sans"/>
                         </a:rPr>
@@ -5529,7 +5696,7 @@
                       <a:r>
                         <a:rPr sz="1400">
                           <a:solidFill>
-                            <a:srgbClr val="4B545D"/>
+                            <a:srgbClr val="4A4448"/>
                           </a:solidFill>
                           <a:latin typeface="DejaVu Sans"/>
                         </a:rPr>
@@ -5544,7 +5711,7 @@
                   </a:tcPr>
                 </a:tc>
               </a:tr>
-              <a:tr h="460247">
+              <a:tr h="371856">
                 <a:tc>
                   <a:txBody>
                     <a:bodyPr wrap="square"/>
@@ -5558,7 +5725,7 @@
                       <a:r>
                         <a:rPr sz="1400">
                           <a:solidFill>
-                            <a:srgbClr val="1F3752"/>
+                            <a:srgbClr val="5B1220"/>
                           </a:solidFill>
                           <a:latin typeface="DejaVu Sans"/>
                         </a:rPr>
@@ -5585,7 +5752,7 @@
                       <a:r>
                         <a:rPr sz="1400">
                           <a:solidFill>
-                            <a:srgbClr val="4B545D"/>
+                            <a:srgbClr val="4A4448"/>
                           </a:solidFill>
                           <a:latin typeface="DejaVu Sans"/>
                         </a:rPr>
@@ -5612,7 +5779,7 @@
                       <a:r>
                         <a:rPr sz="1400">
                           <a:solidFill>
-                            <a:srgbClr val="4B545D"/>
+                            <a:srgbClr val="4A4448"/>
                           </a:solidFill>
                           <a:latin typeface="DejaVu Sans"/>
                         </a:rPr>
@@ -5639,7 +5806,7 @@
                       <a:r>
                         <a:rPr sz="1400">
                           <a:solidFill>
-                            <a:srgbClr val="4B545D"/>
+                            <a:srgbClr val="4A4448"/>
                           </a:solidFill>
                           <a:latin typeface="DejaVu Sans"/>
                         </a:rPr>
@@ -5654,7 +5821,7 @@
                   </a:tcPr>
                 </a:tc>
               </a:tr>
-              <a:tr h="460247">
+              <a:tr h="371856">
                 <a:tc>
                   <a:txBody>
                     <a:bodyPr wrap="square"/>
@@ -5668,7 +5835,7 @@
                       <a:r>
                         <a:rPr sz="1400">
                           <a:solidFill>
-                            <a:srgbClr val="1F3752"/>
+                            <a:srgbClr val="5B1220"/>
                           </a:solidFill>
                           <a:latin typeface="DejaVu Sans"/>
                         </a:rPr>
@@ -5695,7 +5862,7 @@
                       <a:r>
                         <a:rPr sz="1400">
                           <a:solidFill>
-                            <a:srgbClr val="4B545D"/>
+                            <a:srgbClr val="4A4448"/>
                           </a:solidFill>
                           <a:latin typeface="DejaVu Sans"/>
                         </a:rPr>
@@ -5722,7 +5889,7 @@
                       <a:r>
                         <a:rPr sz="1400">
                           <a:solidFill>
-                            <a:srgbClr val="4B545D"/>
+                            <a:srgbClr val="4A4448"/>
                           </a:solidFill>
                           <a:latin typeface="DejaVu Sans"/>
                         </a:rPr>
@@ -5749,7 +5916,7 @@
                       <a:r>
                         <a:rPr sz="1400">
                           <a:solidFill>
-                            <a:srgbClr val="4B545D"/>
+                            <a:srgbClr val="4A4448"/>
                           </a:solidFill>
                           <a:latin typeface="DejaVu Sans"/>
                         </a:rPr>
@@ -5764,7 +5931,7 @@
                   </a:tcPr>
                 </a:tc>
               </a:tr>
-              <a:tr h="460247">
+              <a:tr h="371856">
                 <a:tc>
                   <a:txBody>
                     <a:bodyPr wrap="square"/>
@@ -5778,7 +5945,7 @@
                       <a:r>
                         <a:rPr sz="1400">
                           <a:solidFill>
-                            <a:srgbClr val="1F3752"/>
+                            <a:srgbClr val="5B1220"/>
                           </a:solidFill>
                           <a:latin typeface="DejaVu Sans"/>
                         </a:rPr>
@@ -5805,7 +5972,7 @@
                       <a:r>
                         <a:rPr sz="1400">
                           <a:solidFill>
-                            <a:srgbClr val="4B545D"/>
+                            <a:srgbClr val="4A4448"/>
                           </a:solidFill>
                           <a:latin typeface="DejaVu Sans"/>
                         </a:rPr>
@@ -5832,7 +5999,7 @@
                       <a:r>
                         <a:rPr sz="1400">
                           <a:solidFill>
-                            <a:srgbClr val="4B545D"/>
+                            <a:srgbClr val="4A4448"/>
                           </a:solidFill>
                           <a:latin typeface="DejaVu Sans"/>
                         </a:rPr>
@@ -5859,7 +6026,7 @@
                       <a:r>
                         <a:rPr sz="1400">
                           <a:solidFill>
-                            <a:srgbClr val="4B545D"/>
+                            <a:srgbClr val="4A4448"/>
                           </a:solidFill>
                           <a:latin typeface="DejaVu Sans"/>
                         </a:rPr>
@@ -5886,8 +6053,8 @@
         </p:nvSpPr>
         <p:spPr>
           <a:xfrm>
-            <a:off x="822960" y="5292084"/>
-            <a:ext cx="10515600" cy="983615"/>
+            <a:off x="822960" y="4761738"/>
+            <a:ext cx="10515600" cy="1551305"/>
           </a:xfrm>
           <a:prstGeom prst="rect">
             <a:avLst/>
@@ -5909,7 +6076,7 @@
               </a:spcAft>
               <a:defRPr sz="1300">
                 <a:solidFill>
-                  <a:srgbClr val="4B545D"/>
+                  <a:srgbClr val="4A4448"/>
                 </a:solidFill>
                 <a:latin typeface="DejaVu Sans"/>
               </a:defRPr>
@@ -5928,7 +6095,7 @@
               </a:spcAft>
               <a:defRPr sz="1100">
                 <a:solidFill>
-                  <a:srgbClr val="4B545D"/>
+                  <a:srgbClr val="4A4448"/>
                 </a:solidFill>
                 <a:latin typeface="DejaVu Sans"/>
               </a:defRPr>
@@ -5947,13 +6114,32 @@
               </a:spcAft>
               <a:defRPr sz="1300">
                 <a:solidFill>
-                  <a:srgbClr val="4B545D"/>
+                  <a:srgbClr val="4A4448"/>
                 </a:solidFill>
                 <a:latin typeface="DejaVu Sans"/>
               </a:defRPr>
             </a:pPr>
             <a:r>
               <a:t>•  Results are reference comparisons, not contractual compliance or live warnings.</a:t>
+            </a:r>
+          </a:p>
+          <a:p>
+            <a:pPr>
+              <a:lnSpc>
+                <a:spcPct val="125000"/>
+              </a:lnSpc>
+              <a:spcAft>
+                <a:spcPts val="0"/>
+              </a:spcAft>
+              <a:defRPr sz="1500" b="1">
+                <a:solidFill>
+                  <a:srgbClr val="C8102E"/>
+                </a:solidFill>
+                <a:latin typeface="DejaVu Sans"/>
+              </a:defRPr>
+            </a:pPr>
+            <a:r>
+              <a:t>Bottom line: only about one ticket in five met its priority reference, and the shortfall is consistent across every priority band.</a:t>
             </a:r>
           </a:p>
         </p:txBody>
@@ -5983,7 +6169,7 @@
             <a:pPr>
               <a:defRPr sz="1000">
                 <a:solidFill>
-                  <a:srgbClr val="4B545D"/>
+                  <a:srgbClr val="4A4448"/>
                 </a:solidFill>
               </a:defRPr>
             </a:pPr>
@@ -6018,7 +6204,7 @@
             <a:pPr>
               <a:defRPr sz="1000" b="0">
                 <a:solidFill>
-                  <a:srgbClr val="4B545D"/>
+                  <a:srgbClr val="4A4448"/>
                 </a:solidFill>
                 <a:latin typeface="DejaVu Sans"/>
               </a:defRPr>
@@ -6043,7 +6229,7 @@
     <p:bg>
       <p:bgPr>
         <a:solidFill>
-          <a:srgbClr val="F8FAFC"/>
+          <a:srgbClr val="FDF9F9"/>
         </a:solidFill>
         <a:effectLst/>
       </p:bgPr>
@@ -6070,7 +6256,7 @@
             <a:avLst/>
           </a:prstGeom>
           <a:solidFill>
-            <a:srgbClr val="3470A8"/>
+            <a:srgbClr val="C8102E"/>
           </a:solidFill>
           <a:ln>
             <a:noFill/>
@@ -6126,7 +6312,7 @@
               </a:lnSpc>
               <a:defRPr sz="2800" b="1">
                 <a:solidFill>
-                  <a:srgbClr val="1F3752"/>
+                  <a:srgbClr val="5B1220"/>
                 </a:solidFill>
                 <a:latin typeface="DejaVu Sans"/>
               </a:defRPr>
@@ -6152,7 +6338,7 @@
             <a:avLst/>
           </a:prstGeom>
           <a:solidFill>
-            <a:srgbClr val="3470A8"/>
+            <a:srgbClr val="C8102E"/>
           </a:solidFill>
           <a:ln>
             <a:noFill/>
@@ -6211,7 +6397,7 @@
               </a:spcAft>
               <a:defRPr sz="1800">
                 <a:solidFill>
-                  <a:srgbClr val="4B545D"/>
+                  <a:srgbClr val="4A4448"/>
                 </a:solidFill>
                 <a:latin typeface="DejaVu Sans"/>
               </a:defRPr>
@@ -6232,7 +6418,7 @@
         </p:nvGraphicFramePr>
         <p:xfrm>
           <a:off x="822960" y="2488692"/>
-          <a:ext cx="10515596" cy="2053336"/>
+          <a:ext cx="10515595" cy="1504696"/>
         </p:xfrm>
         <a:graphic>
           <a:graphicData uri="http://schemas.openxmlformats.org/drawingml/2006/table">
@@ -6241,15 +6427,15 @@
                 <a:tableStyleId>{5C22544A-7EE6-4342-B048-85BDC9FD1C3A}</a:tableStyleId>
               </a:tblPr>
               <a:tblGrid>
-                <a:gridCol w="1502228"/>
-                <a:gridCol w="1502228"/>
-                <a:gridCol w="1502228"/>
-                <a:gridCol w="1502228"/>
-                <a:gridCol w="1502228"/>
-                <a:gridCol w="1502228"/>
-                <a:gridCol w="1502228"/>
+                <a:gridCol w="1129191"/>
+                <a:gridCol w="3105277"/>
+                <a:gridCol w="1199766"/>
+                <a:gridCol w="1199766"/>
+                <a:gridCol w="1199766"/>
+                <a:gridCol w="1270340"/>
+                <a:gridCol w="1411489"/>
               </a:tblGrid>
-              <a:tr h="536448">
+              <a:tr h="535940">
                 <a:tc>
                   <a:txBody>
                     <a:bodyPr wrap="square"/>
@@ -6273,7 +6459,7 @@
                   </a:txBody>
                   <a:tcPr>
                     <a:solidFill>
-                      <a:srgbClr val="1F3752"/>
+                      <a:srgbClr val="5B1220"/>
                     </a:solidFill>
                   </a:tcPr>
                 </a:tc>
@@ -6300,7 +6486,7 @@
                   </a:txBody>
                   <a:tcPr>
                     <a:solidFill>
-                      <a:srgbClr val="1F3752"/>
+                      <a:srgbClr val="5B1220"/>
                     </a:solidFill>
                   </a:tcPr>
                 </a:tc>
@@ -6327,7 +6513,7 @@
                   </a:txBody>
                   <a:tcPr>
                     <a:solidFill>
-                      <a:srgbClr val="1F3752"/>
+                      <a:srgbClr val="5B1220"/>
                     </a:solidFill>
                   </a:tcPr>
                 </a:tc>
@@ -6354,7 +6540,7 @@
                   </a:txBody>
                   <a:tcPr>
                     <a:solidFill>
-                      <a:srgbClr val="1F3752"/>
+                      <a:srgbClr val="5B1220"/>
                     </a:solidFill>
                   </a:tcPr>
                 </a:tc>
@@ -6381,7 +6567,7 @@
                   </a:txBody>
                   <a:tcPr>
                     <a:solidFill>
-                      <a:srgbClr val="1F3752"/>
+                      <a:srgbClr val="5B1220"/>
                     </a:solidFill>
                   </a:tcPr>
                 </a:tc>
@@ -6408,7 +6594,7 @@
                   </a:txBody>
                   <a:tcPr>
                     <a:solidFill>
-                      <a:srgbClr val="1F3752"/>
+                      <a:srgbClr val="5B1220"/>
                     </a:solidFill>
                   </a:tcPr>
                 </a:tc>
@@ -6435,12 +6621,12 @@
                   </a:txBody>
                   <a:tcPr>
                     <a:solidFill>
-                      <a:srgbClr val="1F3752"/>
+                      <a:srgbClr val="5B1220"/>
                     </a:solidFill>
                   </a:tcPr>
                 </a:tc>
               </a:tr>
-              <a:tr h="980440">
+              <a:tr h="535940">
                 <a:tc>
                   <a:txBody>
                     <a:bodyPr wrap="square"/>
@@ -6454,7 +6640,7 @@
                       <a:r>
                         <a:rPr sz="1400">
                           <a:solidFill>
-                            <a:srgbClr val="1F3752"/>
+                            <a:srgbClr val="5B1220"/>
                           </a:solidFill>
                           <a:latin typeface="DejaVu Sans"/>
                         </a:rPr>
@@ -6481,7 +6667,7 @@
                       <a:r>
                         <a:rPr sz="1400">
                           <a:solidFill>
-                            <a:srgbClr val="4B545D"/>
+                            <a:srgbClr val="4A4448"/>
                           </a:solidFill>
                           <a:latin typeface="DejaVu Sans"/>
                         </a:rPr>
@@ -6508,7 +6694,7 @@
                       <a:r>
                         <a:rPr sz="1400">
                           <a:solidFill>
-                            <a:srgbClr val="4B545D"/>
+                            <a:srgbClr val="4A4448"/>
                           </a:solidFill>
                           <a:latin typeface="DejaVu Sans"/>
                         </a:rPr>
@@ -6535,7 +6721,7 @@
                       <a:r>
                         <a:rPr sz="1400">
                           <a:solidFill>
-                            <a:srgbClr val="4B545D"/>
+                            <a:srgbClr val="4A4448"/>
                           </a:solidFill>
                           <a:latin typeface="DejaVu Sans"/>
                         </a:rPr>
@@ -6562,7 +6748,7 @@
                       <a:r>
                         <a:rPr sz="1400">
                           <a:solidFill>
-                            <a:srgbClr val="4B545D"/>
+                            <a:srgbClr val="4A4448"/>
                           </a:solidFill>
                           <a:latin typeface="DejaVu Sans"/>
                         </a:rPr>
@@ -6589,7 +6775,7 @@
                       <a:r>
                         <a:rPr sz="1400">
                           <a:solidFill>
-                            <a:srgbClr val="4B545D"/>
+                            <a:srgbClr val="4A4448"/>
                           </a:solidFill>
                           <a:latin typeface="DejaVu Sans"/>
                         </a:rPr>
@@ -6616,7 +6802,7 @@
                       <a:r>
                         <a:rPr sz="1400">
                           <a:solidFill>
-                            <a:srgbClr val="4B545D"/>
+                            <a:srgbClr val="4A4448"/>
                           </a:solidFill>
                           <a:latin typeface="DejaVu Sans"/>
                         </a:rPr>
@@ -6631,7 +6817,7 @@
                   </a:tcPr>
                 </a:tc>
               </a:tr>
-              <a:tr h="536448">
+              <a:tr h="432816">
                 <a:tc>
                   <a:txBody>
                     <a:bodyPr wrap="square"/>
@@ -6645,7 +6831,7 @@
                       <a:r>
                         <a:rPr sz="1400">
                           <a:solidFill>
-                            <a:srgbClr val="1F3752"/>
+                            <a:srgbClr val="5B1220"/>
                           </a:solidFill>
                           <a:latin typeface="DejaVu Sans"/>
                         </a:rPr>
@@ -6672,7 +6858,7 @@
                       <a:r>
                         <a:rPr sz="1400">
                           <a:solidFill>
-                            <a:srgbClr val="4B545D"/>
+                            <a:srgbClr val="4A4448"/>
                           </a:solidFill>
                           <a:latin typeface="DejaVu Sans"/>
                         </a:rPr>
@@ -6699,7 +6885,7 @@
                       <a:r>
                         <a:rPr sz="1400">
                           <a:solidFill>
-                            <a:srgbClr val="4B545D"/>
+                            <a:srgbClr val="4A4448"/>
                           </a:solidFill>
                           <a:latin typeface="DejaVu Sans"/>
                         </a:rPr>
@@ -6726,7 +6912,7 @@
                       <a:r>
                         <a:rPr sz="1400">
                           <a:solidFill>
-                            <a:srgbClr val="4B545D"/>
+                            <a:srgbClr val="4A4448"/>
                           </a:solidFill>
                           <a:latin typeface="DejaVu Sans"/>
                         </a:rPr>
@@ -6753,7 +6939,7 @@
                       <a:r>
                         <a:rPr sz="1400">
                           <a:solidFill>
-                            <a:srgbClr val="4B545D"/>
+                            <a:srgbClr val="4A4448"/>
                           </a:solidFill>
                           <a:latin typeface="DejaVu Sans"/>
                         </a:rPr>
@@ -6780,7 +6966,7 @@
                       <a:r>
                         <a:rPr sz="1400">
                           <a:solidFill>
-                            <a:srgbClr val="4B545D"/>
+                            <a:srgbClr val="4A4448"/>
                           </a:solidFill>
                           <a:latin typeface="DejaVu Sans"/>
                         </a:rPr>
@@ -6807,7 +6993,7 @@
                       <a:r>
                         <a:rPr sz="1400">
                           <a:solidFill>
-                            <a:srgbClr val="4B545D"/>
+                            <a:srgbClr val="4A4448"/>
                           </a:solidFill>
                           <a:latin typeface="DejaVu Sans"/>
                         </a:rPr>
@@ -6834,8 +7020,8 @@
         </p:nvSpPr>
         <p:spPr>
           <a:xfrm>
-            <a:off x="822960" y="4679188"/>
-            <a:ext cx="10515600" cy="1529715"/>
+            <a:off x="822960" y="4130548"/>
+            <a:ext cx="10515600" cy="2097405"/>
           </a:xfrm>
           <a:prstGeom prst="rect">
             <a:avLst/>
@@ -6857,7 +7043,7 @@
               </a:spcAft>
               <a:defRPr sz="1300">
                 <a:solidFill>
-                  <a:srgbClr val="4B545D"/>
+                  <a:srgbClr val="4A4448"/>
                 </a:solidFill>
                 <a:latin typeface="DejaVu Sans"/>
               </a:defRPr>
@@ -6876,7 +7062,7 @@
               </a:spcAft>
               <a:defRPr sz="1300">
                 <a:solidFill>
-                  <a:srgbClr val="4B545D"/>
+                  <a:srgbClr val="4A4448"/>
                 </a:solidFill>
                 <a:latin typeface="DejaVu Sans"/>
               </a:defRPr>
@@ -6895,7 +7081,7 @@
               </a:spcAft>
               <a:defRPr sz="1300">
                 <a:solidFill>
-                  <a:srgbClr val="4B545D"/>
+                  <a:srgbClr val="4A4448"/>
                 </a:solidFill>
                 <a:latin typeface="DejaVu Sans"/>
               </a:defRPr>
@@ -6914,13 +7100,32 @@
               </a:spcAft>
               <a:defRPr sz="1300">
                 <a:solidFill>
-                  <a:srgbClr val="4B545D"/>
+                  <a:srgbClr val="4A4448"/>
                 </a:solidFill>
                 <a:latin typeface="DejaVu Sans"/>
               </a:defRPr>
             </a:pPr>
             <a:r>
               <a:t>•  Feature reduction: 10/34 training-only MI-selected features; PCA used 26 components for 95% of target-related variance.</a:t>
+            </a:r>
+          </a:p>
+          <a:p>
+            <a:pPr>
+              <a:lnSpc>
+                <a:spcPct val="125000"/>
+              </a:lnSpc>
+              <a:spcAft>
+                <a:spcPts val="0"/>
+              </a:spcAft>
+              <a:defRPr sz="1500" b="1">
+                <a:solidFill>
+                  <a:srgbClr val="C8102E"/>
+                </a:solidFill>
+                <a:latin typeface="DejaVu Sans"/>
+              </a:defRPr>
+            </a:pPr>
+            <a:r>
+              <a:t>Bottom line: both horizons land within roughly five tickets per day of actuals, at ~87% interval coverage against a 90% target.</a:t>
             </a:r>
           </a:p>
         </p:txBody>
@@ -6950,7 +7155,7 @@
             <a:pPr>
               <a:defRPr sz="1000">
                 <a:solidFill>
-                  <a:srgbClr val="4B545D"/>
+                  <a:srgbClr val="4A4448"/>
                 </a:solidFill>
               </a:defRPr>
             </a:pPr>
@@ -6985,7 +7190,7 @@
             <a:pPr>
               <a:defRPr sz="1000" b="0">
                 <a:solidFill>
-                  <a:srgbClr val="4B545D"/>
+                  <a:srgbClr val="4A4448"/>
                 </a:solidFill>
                 <a:latin typeface="DejaVu Sans"/>
               </a:defRPr>
@@ -7010,7 +7215,7 @@
     <p:bg>
       <p:bgPr>
         <a:solidFill>
-          <a:srgbClr val="F8FAFC"/>
+          <a:srgbClr val="FDF9F9"/>
         </a:solidFill>
         <a:effectLst/>
       </p:bgPr>
@@ -7037,7 +7242,7 @@
             <a:avLst/>
           </a:prstGeom>
           <a:solidFill>
-            <a:srgbClr val="3470A8"/>
+            <a:srgbClr val="C8102E"/>
           </a:solidFill>
           <a:ln>
             <a:noFill/>
@@ -7093,7 +7298,7 @@
               </a:lnSpc>
               <a:defRPr sz="2800" b="1">
                 <a:solidFill>
-                  <a:srgbClr val="1F3752"/>
+                  <a:srgbClr val="5B1220"/>
                 </a:solidFill>
                 <a:latin typeface="DejaVu Sans"/>
               </a:defRPr>
@@ -7119,7 +7324,7 @@
             <a:avLst/>
           </a:prstGeom>
           <a:solidFill>
-            <a:srgbClr val="3470A8"/>
+            <a:srgbClr val="C8102E"/>
           </a:solidFill>
           <a:ln>
             <a:noFill/>
@@ -7178,7 +7383,7 @@
               </a:spcAft>
               <a:defRPr sz="1800">
                 <a:solidFill>
-                  <a:srgbClr val="4B545D"/>
+                  <a:srgbClr val="4A4448"/>
                 </a:solidFill>
                 <a:latin typeface="DejaVu Sans"/>
               </a:defRPr>
@@ -7205,8 +7410,8 @@
         </p:blipFill>
         <p:spPr>
           <a:xfrm>
-            <a:off x="2797195" y="2488692"/>
-            <a:ext cx="6597304" cy="3311524"/>
+            <a:off x="3362679" y="2488692"/>
+            <a:ext cx="5466337" cy="2743834"/>
           </a:xfrm>
           <a:prstGeom prst="rect">
             <a:avLst/>
@@ -7221,8 +7426,8 @@
         </p:nvSpPr>
         <p:spPr>
           <a:xfrm>
-            <a:off x="822960" y="5937376"/>
-            <a:ext cx="10515600" cy="399415"/>
+            <a:off x="822960" y="5369686"/>
+            <a:ext cx="10515600" cy="967105"/>
           </a:xfrm>
           <a:prstGeom prst="rect">
             <a:avLst/>
@@ -7244,13 +7449,32 @@
               </a:spcAft>
               <a:defRPr sz="1300">
                 <a:solidFill>
-                  <a:srgbClr val="4B545D"/>
+                  <a:srgbClr val="4A4448"/>
                 </a:solidFill>
                 <a:latin typeface="DejaVu Sans"/>
               </a:defRPr>
             </a:pPr>
             <a:r>
               <a:t>•  Full step-by-step mapping with exact function and file names: docs/process_flow.md.</a:t>
+            </a:r>
+          </a:p>
+          <a:p>
+            <a:pPr>
+              <a:lnSpc>
+                <a:spcPct val="125000"/>
+              </a:lnSpc>
+              <a:spcAft>
+                <a:spcPts val="0"/>
+              </a:spcAft>
+              <a:defRPr sz="1500" b="1">
+                <a:solidFill>
+                  <a:srgbClr val="C8102E"/>
+                </a:solidFill>
+                <a:latin typeface="DejaVu Sans"/>
+              </a:defRPr>
+            </a:pPr>
+            <a:r>
+              <a:t>Bottom line: a single reproducible pipeline feeds the decks, report and app from one canonical output folder.</a:t>
             </a:r>
           </a:p>
         </p:txBody>
@@ -7280,7 +7504,7 @@
             <a:pPr>
               <a:defRPr sz="1000">
                 <a:solidFill>
-                  <a:srgbClr val="4B545D"/>
+                  <a:srgbClr val="4A4448"/>
                 </a:solidFill>
               </a:defRPr>
             </a:pPr>
@@ -7315,7 +7539,7 @@
             <a:pPr>
               <a:defRPr sz="1000" b="0">
                 <a:solidFill>
-                  <a:srgbClr val="4B545D"/>
+                  <a:srgbClr val="4A4448"/>
                 </a:solidFill>
                 <a:latin typeface="DejaVu Sans"/>
               </a:defRPr>
@@ -7340,7 +7564,7 @@
     <p:bg>
       <p:bgPr>
         <a:solidFill>
-          <a:srgbClr val="F8FAFC"/>
+          <a:srgbClr val="FDF9F9"/>
         </a:solidFill>
         <a:effectLst/>
       </p:bgPr>
@@ -7367,7 +7591,7 @@
             <a:avLst/>
           </a:prstGeom>
           <a:solidFill>
-            <a:srgbClr val="3470A8"/>
+            <a:srgbClr val="C8102E"/>
           </a:solidFill>
           <a:ln>
             <a:noFill/>
@@ -7423,7 +7647,7 @@
               </a:lnSpc>
               <a:defRPr sz="2800" b="1">
                 <a:solidFill>
-                  <a:srgbClr val="1F3752"/>
+                  <a:srgbClr val="5B1220"/>
                 </a:solidFill>
                 <a:latin typeface="DejaVu Sans"/>
               </a:defRPr>
@@ -7449,7 +7673,7 @@
             <a:avLst/>
           </a:prstGeom>
           <a:solidFill>
-            <a:srgbClr val="3470A8"/>
+            <a:srgbClr val="C8102E"/>
           </a:solidFill>
           <a:ln>
             <a:noFill/>
@@ -7508,7 +7732,7 @@
               </a:spcAft>
               <a:defRPr sz="1300">
                 <a:solidFill>
-                  <a:srgbClr val="4B545D"/>
+                  <a:srgbClr val="4A4448"/>
                 </a:solidFill>
                 <a:latin typeface="DejaVu Sans"/>
               </a:defRPr>
@@ -7527,7 +7751,7 @@
               </a:spcAft>
               <a:defRPr sz="1300">
                 <a:solidFill>
-                  <a:srgbClr val="4B545D"/>
+                  <a:srgbClr val="4A4448"/>
                 </a:solidFill>
                 <a:latin typeface="DejaVu Sans"/>
               </a:defRPr>
@@ -7546,7 +7770,7 @@
               </a:spcAft>
               <a:defRPr sz="1300">
                 <a:solidFill>
-                  <a:srgbClr val="4B545D"/>
+                  <a:srgbClr val="4A4448"/>
                 </a:solidFill>
                 <a:latin typeface="DejaVu Sans"/>
               </a:defRPr>
@@ -7565,7 +7789,7 @@
               </a:spcAft>
               <a:defRPr sz="1300">
                 <a:solidFill>
-                  <a:srgbClr val="4B545D"/>
+                  <a:srgbClr val="4A4448"/>
                 </a:solidFill>
                 <a:latin typeface="DejaVu Sans"/>
               </a:defRPr>
@@ -7584,7 +7808,7 @@
               </a:spcAft>
               <a:defRPr sz="1300">
                 <a:solidFill>
-                  <a:srgbClr val="4B545D"/>
+                  <a:srgbClr val="4A4448"/>
                 </a:solidFill>
                 <a:latin typeface="DejaVu Sans"/>
               </a:defRPr>
@@ -7611,8 +7835,8 @@
         </p:blipFill>
         <p:spPr>
           <a:xfrm>
-            <a:off x="2712567" y="3511041"/>
-            <a:ext cx="6766560" cy="2105152"/>
+            <a:off x="3558794" y="3511041"/>
+            <a:ext cx="5074106" cy="1578610"/>
           </a:xfrm>
           <a:prstGeom prst="rect">
             <a:avLst/>
@@ -7627,8 +7851,8 @@
         </p:nvSpPr>
         <p:spPr>
           <a:xfrm>
-            <a:off x="822960" y="5753353"/>
-            <a:ext cx="10515600" cy="542290"/>
+            <a:off x="822960" y="5226811"/>
+            <a:ext cx="10515600" cy="1109980"/>
           </a:xfrm>
           <a:prstGeom prst="rect">
             <a:avLst/>
@@ -7650,13 +7874,32 @@
               </a:spcAft>
               <a:defRPr sz="1100">
                 <a:solidFill>
-                  <a:srgbClr val="4B545D"/>
+                  <a:srgbClr val="4A4448"/>
                 </a:solidFill>
                 <a:latin typeface="DejaVu Sans"/>
               </a:defRPr>
             </a:pPr>
             <a:r>
               <a:t>•  30-day final-test MAE by lead-time band (notebook 03): error typically grows with lead time, one reason a 7-day path is tracked separately.</a:t>
+            </a:r>
+          </a:p>
+          <a:p>
+            <a:pPr>
+              <a:lnSpc>
+                <a:spcPct val="125000"/>
+              </a:lnSpc>
+              <a:spcAft>
+                <a:spcPts val="0"/>
+              </a:spcAft>
+              <a:defRPr sz="1500" b="1">
+                <a:solidFill>
+                  <a:srgbClr val="C8102E"/>
+                </a:solidFill>
+                <a:latin typeface="DejaVu Sans"/>
+              </a:defRPr>
+            </a:pPr>
+            <a:r>
+              <a:t>Bottom line: separate 7- and 30-day backtests, selected on validation only, keep the reported test results honest.</a:t>
             </a:r>
           </a:p>
         </p:txBody>
@@ -7686,7 +7929,7 @@
             <a:pPr>
               <a:defRPr sz="1000">
                 <a:solidFill>
-                  <a:srgbClr val="4B545D"/>
+                  <a:srgbClr val="4A4448"/>
                 </a:solidFill>
               </a:defRPr>
             </a:pPr>
@@ -7721,7 +7964,7 @@
             <a:pPr>
               <a:defRPr sz="1000" b="0">
                 <a:solidFill>
-                  <a:srgbClr val="4B545D"/>
+                  <a:srgbClr val="4A4448"/>
                 </a:solidFill>
                 <a:latin typeface="DejaVu Sans"/>
               </a:defRPr>
@@ -7746,7 +7989,7 @@
     <p:bg>
       <p:bgPr>
         <a:solidFill>
-          <a:srgbClr val="F8FAFC"/>
+          <a:srgbClr val="FDF9F9"/>
         </a:solidFill>
         <a:effectLst/>
       </p:bgPr>
@@ -7773,7 +8016,7 @@
             <a:avLst/>
           </a:prstGeom>
           <a:solidFill>
-            <a:srgbClr val="3470A8"/>
+            <a:srgbClr val="C8102E"/>
           </a:solidFill>
           <a:ln>
             <a:noFill/>
@@ -7829,7 +8072,7 @@
               </a:lnSpc>
               <a:defRPr sz="2800" b="1">
                 <a:solidFill>
-                  <a:srgbClr val="1F3752"/>
+                  <a:srgbClr val="5B1220"/>
                 </a:solidFill>
                 <a:latin typeface="DejaVu Sans"/>
               </a:defRPr>
@@ -7855,7 +8098,7 @@
             <a:avLst/>
           </a:prstGeom>
           <a:solidFill>
-            <a:srgbClr val="3470A8"/>
+            <a:srgbClr val="C8102E"/>
           </a:solidFill>
           <a:ln>
             <a:noFill/>
@@ -7914,7 +8157,7 @@
               </a:spcAft>
               <a:defRPr sz="1800">
                 <a:solidFill>
-                  <a:srgbClr val="4B545D"/>
+                  <a:srgbClr val="4A4448"/>
                 </a:solidFill>
                 <a:latin typeface="DejaVu Sans"/>
               </a:defRPr>
@@ -7935,7 +8178,7 @@
         </p:nvGraphicFramePr>
         <p:xfrm>
           <a:off x="822960" y="2202942"/>
-          <a:ext cx="10515600" cy="2558796"/>
+          <a:ext cx="10515600" cy="2375916"/>
         </p:xfrm>
         <a:graphic>
           <a:graphicData uri="http://schemas.openxmlformats.org/drawingml/2006/table">
@@ -7949,7 +8192,7 @@
                 <a:gridCol w="2628900"/>
                 <a:gridCol w="2628900"/>
               </a:tblGrid>
-              <a:tr h="475488">
+              <a:tr h="384048">
                 <a:tc>
                   <a:txBody>
                     <a:bodyPr wrap="square"/>
@@ -7973,7 +8216,7 @@
                   </a:txBody>
                   <a:tcPr>
                     <a:solidFill>
-                      <a:srgbClr val="1F3752"/>
+                      <a:srgbClr val="5B1220"/>
                     </a:solidFill>
                   </a:tcPr>
                 </a:tc>
@@ -8000,7 +8243,7 @@
                   </a:txBody>
                   <a:tcPr>
                     <a:solidFill>
-                      <a:srgbClr val="1F3752"/>
+                      <a:srgbClr val="5B1220"/>
                     </a:solidFill>
                   </a:tcPr>
                 </a:tc>
@@ -8027,7 +8270,7 @@
                   </a:txBody>
                   <a:tcPr>
                     <a:solidFill>
-                      <a:srgbClr val="1F3752"/>
+                      <a:srgbClr val="5B1220"/>
                     </a:solidFill>
                   </a:tcPr>
                 </a:tc>
@@ -8054,12 +8297,12 @@
                   </a:txBody>
                   <a:tcPr>
                     <a:solidFill>
-                      <a:srgbClr val="1F3752"/>
+                      <a:srgbClr val="5B1220"/>
                     </a:solidFill>
                   </a:tcPr>
                 </a:tc>
               </a:tr>
-              <a:tr h="475488">
+              <a:tr h="384048">
                 <a:tc>
                   <a:txBody>
                     <a:bodyPr wrap="square"/>
@@ -8073,7 +8316,7 @@
                       <a:r>
                         <a:rPr sz="1400">
                           <a:solidFill>
-                            <a:srgbClr val="1F3752"/>
+                            <a:srgbClr val="5B1220"/>
                           </a:solidFill>
                           <a:latin typeface="DejaVu Sans"/>
                         </a:rPr>
@@ -8100,7 +8343,7 @@
                       <a:r>
                         <a:rPr sz="1400">
                           <a:solidFill>
-                            <a:srgbClr val="4B545D"/>
+                            <a:srgbClr val="4A4448"/>
                           </a:solidFill>
                           <a:latin typeface="DejaVu Sans"/>
                         </a:rPr>
@@ -8127,7 +8370,7 @@
                       <a:r>
                         <a:rPr sz="1400">
                           <a:solidFill>
-                            <a:srgbClr val="4B545D"/>
+                            <a:srgbClr val="4A4448"/>
                           </a:solidFill>
                           <a:latin typeface="DejaVu Sans"/>
                         </a:rPr>
@@ -8154,7 +8397,7 @@
                       <a:r>
                         <a:rPr sz="1400">
                           <a:solidFill>
-                            <a:srgbClr val="4B545D"/>
+                            <a:srgbClr val="4A4448"/>
                           </a:solidFill>
                           <a:latin typeface="DejaVu Sans"/>
                         </a:rPr>
@@ -8183,7 +8426,7 @@
                       <a:r>
                         <a:rPr sz="1400">
                           <a:solidFill>
-                            <a:srgbClr val="1F3752"/>
+                            <a:srgbClr val="5B1220"/>
                           </a:solidFill>
                           <a:latin typeface="DejaVu Sans"/>
                         </a:rPr>
@@ -8210,7 +8453,7 @@
                       <a:r>
                         <a:rPr sz="1400">
                           <a:solidFill>
-                            <a:srgbClr val="4B545D"/>
+                            <a:srgbClr val="4A4448"/>
                           </a:solidFill>
                           <a:latin typeface="DejaVu Sans"/>
                         </a:rPr>
@@ -8237,7 +8480,7 @@
                       <a:r>
                         <a:rPr sz="1400">
                           <a:solidFill>
-                            <a:srgbClr val="4B545D"/>
+                            <a:srgbClr val="4A4448"/>
                           </a:solidFill>
                           <a:latin typeface="DejaVu Sans"/>
                         </a:rPr>
@@ -8264,7 +8507,7 @@
                       <a:r>
                         <a:rPr sz="1400">
                           <a:solidFill>
-                            <a:srgbClr val="4B545D"/>
+                            <a:srgbClr val="4A4448"/>
                           </a:solidFill>
                           <a:latin typeface="DejaVu Sans"/>
                         </a:rPr>
@@ -8293,7 +8536,7 @@
                       <a:r>
                         <a:rPr sz="1400">
                           <a:solidFill>
-                            <a:srgbClr val="1F3752"/>
+                            <a:srgbClr val="5B1220"/>
                           </a:solidFill>
                           <a:latin typeface="DejaVu Sans"/>
                         </a:rPr>
@@ -8320,7 +8563,7 @@
                       <a:r>
                         <a:rPr sz="1400">
                           <a:solidFill>
-                            <a:srgbClr val="4B545D"/>
+                            <a:srgbClr val="4A4448"/>
                           </a:solidFill>
                           <a:latin typeface="DejaVu Sans"/>
                         </a:rPr>
@@ -8347,7 +8590,7 @@
                       <a:r>
                         <a:rPr sz="1400">
                           <a:solidFill>
-                            <a:srgbClr val="4B545D"/>
+                            <a:srgbClr val="4A4448"/>
                           </a:solidFill>
                           <a:latin typeface="DejaVu Sans"/>
                         </a:rPr>
@@ -8374,7 +8617,7 @@
                       <a:r>
                         <a:rPr sz="1400">
                           <a:solidFill>
-                            <a:srgbClr val="4B545D"/>
+                            <a:srgbClr val="4A4448"/>
                           </a:solidFill>
                           <a:latin typeface="DejaVu Sans"/>
                         </a:rPr>
@@ -8403,7 +8646,7 @@
                       <a:r>
                         <a:rPr sz="1400">
                           <a:solidFill>
-                            <a:srgbClr val="1F3752"/>
+                            <a:srgbClr val="5B1220"/>
                           </a:solidFill>
                           <a:latin typeface="DejaVu Sans"/>
                         </a:rPr>
@@ -8430,7 +8673,7 @@
                       <a:r>
                         <a:rPr sz="1400">
                           <a:solidFill>
-                            <a:srgbClr val="4B545D"/>
+                            <a:srgbClr val="4A4448"/>
                           </a:solidFill>
                           <a:latin typeface="DejaVu Sans"/>
                         </a:rPr>
@@ -8457,7 +8700,7 @@
                       <a:r>
                         <a:rPr sz="1400">
                           <a:solidFill>
-                            <a:srgbClr val="4B545D"/>
+                            <a:srgbClr val="4A4448"/>
                           </a:solidFill>
                           <a:latin typeface="DejaVu Sans"/>
                         </a:rPr>
@@ -8484,7 +8727,7 @@
                       <a:r>
                         <a:rPr sz="1400">
                           <a:solidFill>
-                            <a:srgbClr val="4B545D"/>
+                            <a:srgbClr val="4A4448"/>
                           </a:solidFill>
                           <a:latin typeface="DejaVu Sans"/>
                         </a:rPr>
@@ -8511,8 +8754,8 @@
         </p:nvSpPr>
         <p:spPr>
           <a:xfrm>
-            <a:off x="822960" y="4898898"/>
-            <a:ext cx="10515600" cy="913765"/>
+            <a:off x="822960" y="4716018"/>
+            <a:ext cx="10515600" cy="1481455"/>
           </a:xfrm>
           <a:prstGeom prst="rect">
             <a:avLst/>
@@ -8534,7 +8777,7 @@
               </a:spcAft>
               <a:defRPr sz="1300">
                 <a:solidFill>
-                  <a:srgbClr val="4B545D"/>
+                  <a:srgbClr val="4A4448"/>
                 </a:solidFill>
                 <a:latin typeface="DejaVu Sans"/>
               </a:defRPr>
@@ -8553,13 +8796,32 @@
               </a:spcAft>
               <a:defRPr sz="1300">
                 <a:solidFill>
-                  <a:srgbClr val="4B545D"/>
+                  <a:srgbClr val="4A4448"/>
                 </a:solidFill>
                 <a:latin typeface="DejaVu Sans"/>
               </a:defRPr>
             </a:pPr>
             <a:r>
               <a:t>•  7-day comparison: XGBoost autoregression (28-day lags), test MAE 5.05 tickets/day (its own validation-selected model).</a:t>
+            </a:r>
+          </a:p>
+          <a:p>
+            <a:pPr>
+              <a:lnSpc>
+                <a:spcPct val="125000"/>
+              </a:lnSpc>
+              <a:spcAft>
+                <a:spcPts val="0"/>
+              </a:spcAft>
+              <a:defRPr sz="1500" b="1">
+                <a:solidFill>
+                  <a:srgbClr val="C8102E"/>
+                </a:solidFill>
+                <a:latin typeface="DejaVu Sans"/>
+              </a:defRPr>
+            </a:pPr>
+            <a:r>
+              <a:t>Bottom line: ETS wins the 30-day horizon and XGBoost the 7-day — both clearly beat the seasonal-naive baseline.</a:t>
             </a:r>
           </a:p>
         </p:txBody>
@@ -8589,7 +8851,7 @@
             <a:pPr>
               <a:defRPr sz="1000">
                 <a:solidFill>
-                  <a:srgbClr val="4B545D"/>
+                  <a:srgbClr val="4A4448"/>
                 </a:solidFill>
               </a:defRPr>
             </a:pPr>
@@ -8624,7 +8886,7 @@
             <a:pPr>
               <a:defRPr sz="1000" b="0">
                 <a:solidFill>
-                  <a:srgbClr val="4B545D"/>
+                  <a:srgbClr val="4A4448"/>
                 </a:solidFill>
                 <a:latin typeface="DejaVu Sans"/>
               </a:defRPr>
@@ -8649,7 +8911,7 @@
     <p:bg>
       <p:bgPr>
         <a:solidFill>
-          <a:srgbClr val="F8FAFC"/>
+          <a:srgbClr val="FDF9F9"/>
         </a:solidFill>
         <a:effectLst/>
       </p:bgPr>
@@ -8676,7 +8938,7 @@
             <a:avLst/>
           </a:prstGeom>
           <a:solidFill>
-            <a:srgbClr val="3470A8"/>
+            <a:srgbClr val="C8102E"/>
           </a:solidFill>
           <a:ln>
             <a:noFill/>
@@ -8732,7 +8994,7 @@
               </a:lnSpc>
               <a:defRPr sz="2800" b="1">
                 <a:solidFill>
-                  <a:srgbClr val="1F3752"/>
+                  <a:srgbClr val="5B1220"/>
                 </a:solidFill>
                 <a:latin typeface="DejaVu Sans"/>
               </a:defRPr>
@@ -8758,7 +9020,7 @@
             <a:avLst/>
           </a:prstGeom>
           <a:solidFill>
-            <a:srgbClr val="3470A8"/>
+            <a:srgbClr val="C8102E"/>
           </a:solidFill>
           <a:ln>
             <a:noFill/>
@@ -8817,7 +9079,7 @@
               </a:spcAft>
               <a:defRPr sz="1300">
                 <a:solidFill>
-                  <a:srgbClr val="4B545D"/>
+                  <a:srgbClr val="4A4448"/>
                 </a:solidFill>
                 <a:latin typeface="DejaVu Sans"/>
               </a:defRPr>
@@ -8836,7 +9098,7 @@
               </a:spcAft>
               <a:defRPr sz="1300">
                 <a:solidFill>
-                  <a:srgbClr val="4B545D"/>
+                  <a:srgbClr val="4A4448"/>
                 </a:solidFill>
                 <a:latin typeface="DejaVu Sans"/>
               </a:defRPr>
@@ -8855,7 +9117,7 @@
               </a:spcAft>
               <a:defRPr sz="1100">
                 <a:solidFill>
-                  <a:srgbClr val="4B545D"/>
+                  <a:srgbClr val="4A4448"/>
                 </a:solidFill>
                 <a:latin typeface="DejaVu Sans"/>
               </a:defRPr>
@@ -8899,7 +9161,7 @@
         <p:spPr>
           <a:xfrm>
             <a:off x="822960" y="4789181"/>
-            <a:ext cx="10515600" cy="542290"/>
+            <a:ext cx="10515600" cy="1109980"/>
           </a:xfrm>
           <a:prstGeom prst="rect">
             <a:avLst/>
@@ -8921,13 +9183,32 @@
               </a:spcAft>
               <a:defRPr sz="1100">
                 <a:solidFill>
-                  <a:srgbClr val="4B545D"/>
+                  <a:srgbClr val="4A4448"/>
                 </a:solidFill>
                 <a:latin typeface="DejaVu Sans"/>
               </a:defRPr>
             </a:pPr>
             <a:r>
               <a:t>•  Leading XGBoost validation features: lag_21, lag_28, lag_14. Validation-only SHAP highlights: lag_28, lag_21, lag_14; importance is association, not causation. Feature selection kept 10/34 MI-selected features.</a:t>
+            </a:r>
+          </a:p>
+          <a:p>
+            <a:pPr>
+              <a:lnSpc>
+                <a:spcPct val="125000"/>
+              </a:lnSpc>
+              <a:spcAft>
+                <a:spcPts val="0"/>
+              </a:spcAft>
+              <a:defRPr sz="1500" b="1">
+                <a:solidFill>
+                  <a:srgbClr val="C8102E"/>
+                </a:solidFill>
+                <a:latin typeface="DejaVu Sans"/>
+              </a:defRPr>
+            </a:pPr>
+            <a:r>
+              <a:t>Bottom line: errors are explainable and intervals are calibrated, but feature importance signals association, not causation.</a:t>
             </a:r>
           </a:p>
         </p:txBody>
@@ -8957,7 +9238,7 @@
             <a:pPr>
               <a:defRPr sz="1000">
                 <a:solidFill>
-                  <a:srgbClr val="4B545D"/>
+                  <a:srgbClr val="4A4448"/>
                 </a:solidFill>
               </a:defRPr>
             </a:pPr>
@@ -8992,7 +9273,7 @@
             <a:pPr>
               <a:defRPr sz="1000" b="0">
                 <a:solidFill>
-                  <a:srgbClr val="4B545D"/>
+                  <a:srgbClr val="4A4448"/>
                 </a:solidFill>
                 <a:latin typeface="DejaVu Sans"/>
               </a:defRPr>
